--- a/ML_Ranking.pptx
+++ b/ML_Ranking.pptx
@@ -7,6 +7,7 @@
   <p:sldIdLst>
     <p:sldId id="257" r:id="rId2"/>
     <p:sldId id="256" r:id="rId3"/>
+    <p:sldId id="258" r:id="rId4"/>
   </p:sldIdLst>
   <p:sldSz cx="12192000" cy="6858000"/>
   <p:notesSz cx="6858000" cy="9144000"/>
@@ -260,7 +261,7 @@
           <a:p>
             <a:fld id="{978CCE7A-74A1-6341-9A34-33AF4358B7E1}" type="datetimeFigureOut">
               <a:rPr lang="en-US" smtClean="0"/>
-              <a:t>5/29/21</a:t>
+              <a:t>6/26/21</a:t>
             </a:fld>
             <a:endParaRPr lang="en-US"/>
           </a:p>
@@ -458,7 +459,7 @@
           <a:p>
             <a:fld id="{978CCE7A-74A1-6341-9A34-33AF4358B7E1}" type="datetimeFigureOut">
               <a:rPr lang="en-US" smtClean="0"/>
-              <a:t>5/29/21</a:t>
+              <a:t>6/26/21</a:t>
             </a:fld>
             <a:endParaRPr lang="en-US"/>
           </a:p>
@@ -666,7 +667,7 @@
           <a:p>
             <a:fld id="{978CCE7A-74A1-6341-9A34-33AF4358B7E1}" type="datetimeFigureOut">
               <a:rPr lang="en-US" smtClean="0"/>
-              <a:t>5/29/21</a:t>
+              <a:t>6/26/21</a:t>
             </a:fld>
             <a:endParaRPr lang="en-US"/>
           </a:p>
@@ -864,7 +865,7 @@
           <a:p>
             <a:fld id="{978CCE7A-74A1-6341-9A34-33AF4358B7E1}" type="datetimeFigureOut">
               <a:rPr lang="en-US" smtClean="0"/>
-              <a:t>5/29/21</a:t>
+              <a:t>6/26/21</a:t>
             </a:fld>
             <a:endParaRPr lang="en-US"/>
           </a:p>
@@ -1139,7 +1140,7 @@
           <a:p>
             <a:fld id="{978CCE7A-74A1-6341-9A34-33AF4358B7E1}" type="datetimeFigureOut">
               <a:rPr lang="en-US" smtClean="0"/>
-              <a:t>5/29/21</a:t>
+              <a:t>6/26/21</a:t>
             </a:fld>
             <a:endParaRPr lang="en-US"/>
           </a:p>
@@ -1404,7 +1405,7 @@
           <a:p>
             <a:fld id="{978CCE7A-74A1-6341-9A34-33AF4358B7E1}" type="datetimeFigureOut">
               <a:rPr lang="en-US" smtClean="0"/>
-              <a:t>5/29/21</a:t>
+              <a:t>6/26/21</a:t>
             </a:fld>
             <a:endParaRPr lang="en-US"/>
           </a:p>
@@ -1816,7 +1817,7 @@
           <a:p>
             <a:fld id="{978CCE7A-74A1-6341-9A34-33AF4358B7E1}" type="datetimeFigureOut">
               <a:rPr lang="en-US" smtClean="0"/>
-              <a:t>5/29/21</a:t>
+              <a:t>6/26/21</a:t>
             </a:fld>
             <a:endParaRPr lang="en-US"/>
           </a:p>
@@ -1957,7 +1958,7 @@
           <a:p>
             <a:fld id="{978CCE7A-74A1-6341-9A34-33AF4358B7E1}" type="datetimeFigureOut">
               <a:rPr lang="en-US" smtClean="0"/>
-              <a:t>5/29/21</a:t>
+              <a:t>6/26/21</a:t>
             </a:fld>
             <a:endParaRPr lang="en-US"/>
           </a:p>
@@ -2070,7 +2071,7 @@
           <a:p>
             <a:fld id="{978CCE7A-74A1-6341-9A34-33AF4358B7E1}" type="datetimeFigureOut">
               <a:rPr lang="en-US" smtClean="0"/>
-              <a:t>5/29/21</a:t>
+              <a:t>6/26/21</a:t>
             </a:fld>
             <a:endParaRPr lang="en-US"/>
           </a:p>
@@ -2381,7 +2382,7 @@
           <a:p>
             <a:fld id="{978CCE7A-74A1-6341-9A34-33AF4358B7E1}" type="datetimeFigureOut">
               <a:rPr lang="en-US" smtClean="0"/>
-              <a:t>5/29/21</a:t>
+              <a:t>6/26/21</a:t>
             </a:fld>
             <a:endParaRPr lang="en-US"/>
           </a:p>
@@ -2669,7 +2670,7 @@
           <a:p>
             <a:fld id="{978CCE7A-74A1-6341-9A34-33AF4358B7E1}" type="datetimeFigureOut">
               <a:rPr lang="en-US" smtClean="0"/>
-              <a:t>5/29/21</a:t>
+              <a:t>6/26/21</a:t>
             </a:fld>
             <a:endParaRPr lang="en-US"/>
           </a:p>
@@ -2910,7 +2911,7 @@
           <a:p>
             <a:fld id="{978CCE7A-74A1-6341-9A34-33AF4358B7E1}" type="datetimeFigureOut">
               <a:rPr lang="en-US" smtClean="0"/>
-              <a:t>5/29/21</a:t>
+              <a:t>6/26/21</a:t>
             </a:fld>
             <a:endParaRPr lang="en-US"/>
           </a:p>
@@ -4262,6 +4263,250 @@
 </p:sld>
 </file>
 
+<file path=ppt/slides/slide3.xml><?xml version="1.0" encoding="utf-8"?>
+<p:sld xmlns:a="http://schemas.openxmlformats.org/drawingml/2006/main" xmlns:r="http://schemas.openxmlformats.org/officeDocument/2006/relationships" xmlns:p="http://schemas.openxmlformats.org/presentationml/2006/main">
+  <p:cSld>
+    <p:spTree>
+      <p:nvGrpSpPr>
+        <p:cNvPr id="1" name=""/>
+        <p:cNvGrpSpPr/>
+        <p:nvPr/>
+      </p:nvGrpSpPr>
+      <p:grpSpPr>
+        <a:xfrm>
+          <a:off x="0" y="0"/>
+          <a:ext cx="0" cy="0"/>
+          <a:chOff x="0" y="0"/>
+          <a:chExt cx="0" cy="0"/>
+        </a:xfrm>
+      </p:grpSpPr>
+      <p:sp>
+        <p:nvSpPr>
+          <p:cNvPr id="4" name="TextBox 3">
+            <a:extLst>
+              <a:ext uri="{FF2B5EF4-FFF2-40B4-BE49-F238E27FC236}">
+                <a16:creationId xmlns:a16="http://schemas.microsoft.com/office/drawing/2014/main" id="{8BA73F50-D4AA-7F46-ABE9-D97F1D8B76FC}"/>
+              </a:ext>
+            </a:extLst>
+          </p:cNvPr>
+          <p:cNvSpPr txBox="1"/>
+          <p:nvPr/>
+        </p:nvSpPr>
+        <p:spPr>
+          <a:xfrm>
+            <a:off x="760170" y="927629"/>
+            <a:ext cx="7662441" cy="4524315"/>
+          </a:xfrm>
+          <a:prstGeom prst="rect">
+            <a:avLst/>
+          </a:prstGeom>
+          <a:noFill/>
+        </p:spPr>
+        <p:txBody>
+          <a:bodyPr wrap="square" rtlCol="0">
+            <a:spAutoFit/>
+          </a:bodyPr>
+          <a:lstStyle/>
+          <a:p>
+            <a:r>
+              <a:rPr lang="en-US" dirty="0"/>
+              <a:t>Machine Learning – Ranking</a:t>
+            </a:r>
+          </a:p>
+          <a:p>
+            <a:r>
+              <a:rPr lang="en-US" dirty="0"/>
+              <a:t>video by Jordan Boyd-Graber</a:t>
+            </a:r>
+          </a:p>
+          <a:p>
+            <a:r>
+              <a:rPr lang="en-US" dirty="0"/>
+              <a:t> - </a:t>
+            </a:r>
+            <a:r>
+              <a:rPr lang="en-US" dirty="0">
+                <a:hlinkClick r:id="rId2"/>
+              </a:rPr>
+              <a:t>https://www.youtube.com/watch?v=pmxBDuju3GU</a:t>
+            </a:r>
+            <a:r>
+              <a:rPr lang="en-US" dirty="0"/>
+              <a:t> </a:t>
+            </a:r>
+          </a:p>
+          <a:p>
+            <a:endParaRPr lang="en-US" dirty="0"/>
+          </a:p>
+          <a:p>
+            <a:r>
+              <a:rPr lang="en-US" dirty="0" err="1"/>
+              <a:t>AdaRank</a:t>
+            </a:r>
+            <a:r>
+              <a:rPr lang="en-US" dirty="0"/>
+              <a:t> algorithm (2007):</a:t>
+            </a:r>
+          </a:p>
+          <a:p>
+            <a:r>
+              <a:rPr lang="en-US" dirty="0"/>
+              <a:t> - </a:t>
+            </a:r>
+            <a:r>
+              <a:rPr lang="en-US" dirty="0">
+                <a:hlinkClick r:id="rId3"/>
+              </a:rPr>
+              <a:t>https://github.com/rueycheng/AdaRank</a:t>
+            </a:r>
+            <a:r>
+              <a:rPr lang="en-US" dirty="0"/>
+              <a:t> </a:t>
+            </a:r>
+          </a:p>
+          <a:p>
+            <a:endParaRPr lang="en-US" dirty="0"/>
+          </a:p>
+          <a:p>
+            <a:r>
+              <a:rPr lang="en-US" dirty="0"/>
+              <a:t>Book: Foundations of Machine Learning</a:t>
+            </a:r>
+          </a:p>
+          <a:p>
+            <a:r>
+              <a:rPr lang="en-US" dirty="0" err="1"/>
+              <a:t>Mehryar</a:t>
+            </a:r>
+            <a:r>
+              <a:rPr lang="en-US" dirty="0"/>
+              <a:t> </a:t>
+            </a:r>
+            <a:r>
+              <a:rPr lang="en-US" dirty="0" err="1"/>
+              <a:t>Mohri</a:t>
+            </a:r>
+            <a:r>
+              <a:rPr lang="en-US" dirty="0"/>
+              <a:t>, Afshin </a:t>
+            </a:r>
+            <a:r>
+              <a:rPr lang="en-US" dirty="0" err="1"/>
+              <a:t>Rostamizadeh</a:t>
+            </a:r>
+            <a:r>
+              <a:rPr lang="en-US" dirty="0"/>
+              <a:t>, and </a:t>
+            </a:r>
+            <a:r>
+              <a:rPr lang="en-US" dirty="0" err="1"/>
+              <a:t>Ameet</a:t>
+            </a:r>
+            <a:r>
+              <a:rPr lang="en-US" dirty="0"/>
+              <a:t> Talwalkar</a:t>
+            </a:r>
+          </a:p>
+          <a:p>
+            <a:r>
+              <a:rPr lang="en-US" dirty="0"/>
+              <a:t>MIT Press, Second Edition, 2018</a:t>
+            </a:r>
+          </a:p>
+          <a:p>
+            <a:r>
+              <a:rPr lang="en-US" dirty="0"/>
+              <a:t> - </a:t>
+            </a:r>
+            <a:r>
+              <a:rPr lang="en-US" dirty="0">
+                <a:hlinkClick r:id="rId4"/>
+              </a:rPr>
+              <a:t>https://cs.nyu.edu/~mohri/mlbook/</a:t>
+            </a:r>
+            <a:r>
+              <a:rPr lang="en-US" dirty="0"/>
+              <a:t> </a:t>
+            </a:r>
+          </a:p>
+          <a:p>
+            <a:r>
+              <a:rPr lang="en-US" dirty="0"/>
+              <a:t> - </a:t>
+            </a:r>
+            <a:r>
+              <a:rPr lang="en-US" dirty="0">
+                <a:hlinkClick r:id="rId5"/>
+              </a:rPr>
+              <a:t>https://www.dropbox.com/s/7voitv0vt24c88s/10290.pdf</a:t>
+            </a:r>
+            <a:r>
+              <a:rPr lang="en-US" dirty="0">
+                <a:hlinkClick r:id="rId6"/>
+              </a:rPr>
+              <a:t>?dl=1</a:t>
+            </a:r>
+            <a:r>
+              <a:rPr lang="en-US" dirty="0"/>
+              <a:t> </a:t>
+            </a:r>
+          </a:p>
+          <a:p>
+            <a:endParaRPr lang="en-US" dirty="0"/>
+          </a:p>
+          <a:p>
+            <a:r>
+              <a:rPr lang="en-US" dirty="0"/>
+              <a:t>NYU ML Course by </a:t>
+            </a:r>
+            <a:r>
+              <a:rPr lang="en-US" dirty="0" err="1"/>
+              <a:t>Mehryar</a:t>
+            </a:r>
+            <a:r>
+              <a:rPr lang="en-US" dirty="0"/>
+              <a:t> </a:t>
+            </a:r>
+            <a:r>
+              <a:rPr lang="en-US" dirty="0" err="1"/>
+              <a:t>Mohri</a:t>
+            </a:r>
+            <a:r>
+              <a:rPr lang="en-US" dirty="0"/>
+              <a:t>:</a:t>
+            </a:r>
+          </a:p>
+          <a:p>
+            <a:r>
+              <a:rPr lang="en-US" dirty="0"/>
+              <a:t> - </a:t>
+            </a:r>
+            <a:r>
+              <a:rPr lang="en-US" dirty="0">
+                <a:hlinkClick r:id="rId7"/>
+              </a:rPr>
+              <a:t>https://cs.nyu.edu/~mohri/ml18/</a:t>
+            </a:r>
+            <a:endParaRPr lang="en-US" dirty="0"/>
+          </a:p>
+          <a:p>
+            <a:endParaRPr lang="en-US" dirty="0"/>
+          </a:p>
+        </p:txBody>
+      </p:sp>
+    </p:spTree>
+    <p:extLst>
+      <p:ext uri="{BB962C8B-B14F-4D97-AF65-F5344CB8AC3E}">
+        <p14:creationId xmlns:p14="http://schemas.microsoft.com/office/powerpoint/2010/main" val="4183826655"/>
+      </p:ext>
+    </p:extLst>
+  </p:cSld>
+  <p:clrMapOvr>
+    <a:masterClrMapping/>
+  </p:clrMapOvr>
+</p:sld>
+</file>
+
 <file path=ppt/theme/theme1.xml><?xml version="1.0" encoding="utf-8"?>
 <a:theme xmlns:a="http://schemas.openxmlformats.org/drawingml/2006/main" name="Office Theme">
   <a:themeElements>
